--- a/IR/HW1.pptx
+++ b/IR/HW1.pptx
@@ -516,6 +516,11 @@
         </p:txBody>
       </p:sp>
     </p:spTree>
+    <p:extLst>
+      <p:ext uri="{BB962C8B-B14F-4D97-AF65-F5344CB8AC3E}">
+        <p14:creationId xmlns:p14="http://schemas.microsoft.com/office/powerpoint/2010/main" val="1"/>
+      </p:ext>
+    </p:extLst>
   </p:cSld>
   <p:clrMap bg1="lt1" tx1="dk1" bg2="lt2" tx2="dk2" accent1="accent1" accent2="accent2" accent3="accent3" accent4="accent4" accent5="accent5" accent6="accent6" hlink="hlink" folHlink="folHlink"/>
 </p:handoutMaster>
@@ -714,7 +719,7 @@
             </a:extLst>
           </p:cNvPr>
           <p:cNvSpPr>
-            <a:spLocks noRot="1" noChangeArrowheads="1" noTextEdit="1"/>
+            <a:spLocks noGrp="1" noRot="1" noChangeAspect="1" noChangeArrowheads="1" noTextEdit="1"/>
           </p:cNvSpPr>
           <p:nvPr>
             <p:ph type="sldImg" idx="2"/>
@@ -1329,7 +1334,7 @@
             </a:extLst>
           </p:cNvPr>
           <p:cNvSpPr>
-            <a:spLocks noRot="1" noChangeArrowheads="1" noTextEdit="1"/>
+            <a:spLocks noGrp="1" noRot="1" noChangeAspect="1" noChangeArrowheads="1" noTextEdit="1"/>
           </p:cNvSpPr>
           <p:nvPr>
             <p:ph type="sldImg"/>
@@ -1561,7 +1566,7 @@
             </a:extLst>
           </p:cNvPr>
           <p:cNvSpPr>
-            <a:spLocks noRot="1" noChangeArrowheads="1" noTextEdit="1"/>
+            <a:spLocks noGrp="1" noRot="1" noChangeAspect="1" noChangeArrowheads="1" noTextEdit="1"/>
           </p:cNvSpPr>
           <p:nvPr>
             <p:ph type="sldImg"/>
@@ -1793,7 +1798,7 @@
             </a:extLst>
           </p:cNvPr>
           <p:cNvSpPr>
-            <a:spLocks noRot="1" noChangeArrowheads="1" noTextEdit="1"/>
+            <a:spLocks noGrp="1" noRot="1" noChangeAspect="1" noChangeArrowheads="1" noTextEdit="1"/>
           </p:cNvSpPr>
           <p:nvPr>
             <p:ph type="sldImg"/>
@@ -2025,7 +2030,7 @@
             </a:extLst>
           </p:cNvPr>
           <p:cNvSpPr>
-            <a:spLocks noRot="1" noChangeArrowheads="1" noTextEdit="1"/>
+            <a:spLocks noGrp="1" noRot="1" noChangeAspect="1" noChangeArrowheads="1" noTextEdit="1"/>
           </p:cNvSpPr>
           <p:nvPr>
             <p:ph type="sldImg"/>
@@ -2257,7 +2262,7 @@
             </a:extLst>
           </p:cNvPr>
           <p:cNvSpPr>
-            <a:spLocks noRot="1" noChangeArrowheads="1" noTextEdit="1"/>
+            <a:spLocks noGrp="1" noRot="1" noChangeAspect="1" noChangeArrowheads="1" noTextEdit="1"/>
           </p:cNvSpPr>
           <p:nvPr>
             <p:ph type="sldImg"/>
@@ -2489,7 +2494,7 @@
             </a:extLst>
           </p:cNvPr>
           <p:cNvSpPr>
-            <a:spLocks noRot="1" noChangeArrowheads="1" noTextEdit="1"/>
+            <a:spLocks noGrp="1" noRot="1" noChangeAspect="1" noChangeArrowheads="1" noTextEdit="1"/>
           </p:cNvSpPr>
           <p:nvPr>
             <p:ph type="sldImg"/>
@@ -2721,7 +2726,7 @@
             </a:extLst>
           </p:cNvPr>
           <p:cNvSpPr>
-            <a:spLocks noRot="1" noChangeArrowheads="1" noTextEdit="1"/>
+            <a:spLocks noGrp="1" noRot="1" noChangeAspect="1" noChangeArrowheads="1" noTextEdit="1"/>
           </p:cNvSpPr>
           <p:nvPr>
             <p:ph type="sldImg"/>
@@ -2953,7 +2958,7 @@
             </a:extLst>
           </p:cNvPr>
           <p:cNvSpPr>
-            <a:spLocks noRot="1" noChangeArrowheads="1" noTextEdit="1"/>
+            <a:spLocks noGrp="1" noRot="1" noChangeAspect="1" noChangeArrowheads="1" noTextEdit="1"/>
           </p:cNvSpPr>
           <p:nvPr>
             <p:ph type="sldImg"/>
@@ -3185,7 +3190,7 @@
             </a:extLst>
           </p:cNvPr>
           <p:cNvSpPr>
-            <a:spLocks noRot="1" noChangeArrowheads="1" noTextEdit="1"/>
+            <a:spLocks noGrp="1" noRot="1" noChangeAspect="1" noChangeArrowheads="1" noTextEdit="1"/>
           </p:cNvSpPr>
           <p:nvPr>
             <p:ph type="sldImg"/>
@@ -3417,7 +3422,7 @@
             </a:extLst>
           </p:cNvPr>
           <p:cNvSpPr>
-            <a:spLocks noRot="1" noChangeArrowheads="1" noTextEdit="1"/>
+            <a:spLocks noGrp="1" noRot="1" noChangeAspect="1" noChangeArrowheads="1" noTextEdit="1"/>
           </p:cNvSpPr>
           <p:nvPr>
             <p:ph type="sldImg"/>
@@ -10082,7 +10087,7 @@
         <p:spPr/>
         <p:txBody>
           <a:bodyPr>
-            <a:normAutofit fontScale="92500" lnSpcReduction="20000"/>
+            <a:normAutofit fontScale="85000" lnSpcReduction="20000"/>
           </a:bodyPr>
           <a:lstStyle/>
           <a:p>
@@ -10128,6 +10133,51 @@
                 <a:ea typeface="新細明體" pitchFamily="18" charset="-120"/>
               </a:rPr>
               <a:t>For calling open source libraries, please indicate which APIs or library functions are needed and instructions on where to download, how to install, configure or compile</a:t>
+            </a:r>
+          </a:p>
+          <a:p>
+            <a:pPr lvl="1" eaLnBrk="1" hangingPunct="1">
+              <a:defRPr/>
+            </a:pPr>
+            <a:r>
+              <a:rPr lang="en-US" altLang="zh-TW" sz="2400" dirty="0">
+                <a:ea typeface="新細明體" pitchFamily="18" charset="-120"/>
+              </a:rPr>
+              <a:t>The output: standard </a:t>
+            </a:r>
+            <a:r>
+              <a:rPr lang="en-US" altLang="zh-TW" sz="2400" dirty="0">
+                <a:solidFill>
+                  <a:srgbClr val="0000FF"/>
+                </a:solidFill>
+                <a:ea typeface="新細明體" pitchFamily="18" charset="-120"/>
+              </a:rPr>
+              <a:t>positional index</a:t>
+            </a:r>
+            <a:endParaRPr lang="en-US" altLang="zh-TW" sz="2400" dirty="0">
+              <a:ea typeface="新細明體" pitchFamily="18" charset="-120"/>
+            </a:endParaRPr>
+          </a:p>
+          <a:p>
+            <a:pPr lvl="2" eaLnBrk="1" hangingPunct="1">
+              <a:defRPr/>
+            </a:pPr>
+            <a:r>
+              <a:rPr lang="en-US" altLang="zh-TW" sz="2000" dirty="0">
+                <a:ea typeface="新細明體" pitchFamily="18" charset="-120"/>
+              </a:rPr>
+              <a:t>Two files: dictionary file, postings list</a:t>
+            </a:r>
+          </a:p>
+          <a:p>
+            <a:pPr lvl="2" eaLnBrk="1" hangingPunct="1">
+              <a:defRPr/>
+            </a:pPr>
+            <a:r>
+              <a:rPr lang="en-US" altLang="zh-TW" sz="2000" dirty="0">
+                <a:ea typeface="新細明體" pitchFamily="18" charset="-120"/>
+              </a:rPr>
+              <a:t>Or link to cloud storage containing the above files</a:t>
             </a:r>
           </a:p>
           <a:p>
@@ -10256,7 +10306,7 @@
               <a:rPr lang="en-US" altLang="zh-TW" sz="2800" dirty="0">
                 <a:ea typeface="新細明體" pitchFamily="18" charset="-120"/>
               </a:rPr>
-              <a:t> (</a:t>
+              <a:t> (extended to </a:t>
             </a:r>
             <a:r>
               <a:rPr lang="en-US" altLang="zh-TW" sz="2800" dirty="0">
@@ -10265,7 +10315,7 @@
                 </a:solidFill>
                 <a:ea typeface="新細明體" pitchFamily="18" charset="-120"/>
               </a:rPr>
-              <a:t>Oct. 21, 2026</a:t>
+              <a:t>Oct. 28, 2026</a:t>
             </a:r>
             <a:r>
               <a:rPr lang="en-US" altLang="zh-TW" sz="2800" dirty="0">
